--- a/docs/capacitacion/Analisis Fundamental - Capacitacion GI.pptx
+++ b/docs/capacitacion/Analisis Fundamental - Capacitacion GI.pptx
@@ -3372,14 +3372,56 @@
       </p:sp>
       <p:sp>
         <p:nvSpPr>
-          <p:cNvPr id="7" name="TextBox 6"/>
+          <p:cNvPr id="7" name="Rectangle 6"/>
+          <p:cNvSpPr/>
+          <p:nvPr/>
+        </p:nvSpPr>
+        <p:spPr>
+          <a:xfrm>
+            <a:off x="658368" y="4681728"/>
+            <a:ext cx="10874959" cy="12700"/>
+          </a:xfrm>
+          <a:prstGeom prst="rect">
+            <a:avLst/>
+          </a:prstGeom>
+          <a:solidFill>
+            <a:srgbClr val="1E1E36"/>
+          </a:solidFill>
+          <a:ln>
+            <a:noFill/>
+          </a:ln>
+          <a:effectLst/>
+        </p:spPr>
+        <p:style>
+          <a:lnRef idx="1">
+            <a:schemeClr val="accent1"/>
+          </a:lnRef>
+          <a:fillRef idx="3">
+            <a:schemeClr val="accent1"/>
+          </a:fillRef>
+          <a:effectRef idx="2">
+            <a:schemeClr val="accent1"/>
+          </a:effectRef>
+          <a:fontRef idx="minor">
+            <a:schemeClr val="lt1"/>
+          </a:fontRef>
+        </p:style>
+        <p:txBody>
+          <a:bodyPr rtlCol="0" anchor="ctr"/>
+          <a:lstStyle/>
+          <a:p/>
+        </p:txBody>
+      </p:sp>
+      <p:sp>
+        <p:nvSpPr>
+          <p:cNvPr id="8" name="TextBox 7"/>
           <p:cNvSpPr txBox="1"/>
           <p:nvPr/>
         </p:nvSpPr>
         <p:spPr>
           <a:xfrm>
-            <a:off x="658368" y="5257800"/>
-            <a:ext cx="2560320" cy="182880"/>
+            <a:off x="658368" y="5010912"/>
+            <a:ext cx="6766560" cy="182880"/>
           </a:xfrm>
           <a:prstGeom prst="rect">
             <a:avLst/>
@@ -3404,21 +3446,21 @@
                 </a:solidFill>
                 <a:latin typeface="Segoe UI"/>
               </a:rPr>
-              <a:t>PREPARADO POR</a:t>
-            </a:r>
-          </a:p>
-        </p:txBody>
-      </p:sp>
-      <p:sp>
-        <p:nvSpPr>
-          <p:cNvPr id="8" name="TextBox 7"/>
+              <a:t>ELABORADO POR</a:t>
+            </a:r>
+          </a:p>
+        </p:txBody>
+      </p:sp>
+      <p:sp>
+        <p:nvSpPr>
+          <p:cNvPr id="9" name="TextBox 8"/>
           <p:cNvSpPr txBox="1"/>
           <p:nvPr/>
         </p:nvSpPr>
         <p:spPr>
           <a:xfrm>
-            <a:off x="658368" y="5477256"/>
-            <a:ext cx="2560320" cy="237744"/>
+            <a:off x="658368" y="5230368"/>
+            <a:ext cx="6766560" cy="274320"/>
           </a:xfrm>
           <a:prstGeom prst="rect">
             <a:avLst/>
@@ -3437,27 +3479,27 @@
               </a:lnSpc>
             </a:pPr>
             <a:r>
-              <a:rPr sz="1150" b="1">
+              <a:rPr sz="1400" b="1">
                 <a:solidFill>
                   <a:srgbClr val="FFFFFF"/>
                 </a:solidFill>
                 <a:latin typeface="Segoe UI"/>
               </a:rPr>
-              <a:t>Área de Estudios y Post-Venta</a:t>
-            </a:r>
-          </a:p>
-        </p:txBody>
-      </p:sp>
-      <p:sp>
-        <p:nvSpPr>
-          <p:cNvPr id="9" name="TextBox 8"/>
+              <a:t>Benjamín Ignacio Bravo Soza</a:t>
+            </a:r>
+          </a:p>
+        </p:txBody>
+      </p:sp>
+      <p:sp>
+        <p:nvSpPr>
+          <p:cNvPr id="10" name="TextBox 9"/>
           <p:cNvSpPr txBox="1"/>
           <p:nvPr/>
         </p:nvSpPr>
         <p:spPr>
           <a:xfrm>
-            <a:off x="3401568" y="5257800"/>
-            <a:ext cx="2560320" cy="182880"/>
+            <a:off x="658368" y="5504688"/>
+            <a:ext cx="6766560" cy="201168"/>
           </a:xfrm>
           <a:prstGeom prst="rect">
             <a:avLst/>
@@ -3472,31 +3514,31 @@
           <a:p>
             <a:pPr algn="l">
               <a:lnSpc>
-                <a:spcPct val="124000"/>
-              </a:lnSpc>
-            </a:pPr>
-            <a:r>
-              <a:rPr sz="850" b="1">
-                <a:solidFill>
-                  <a:srgbClr val="6E6A7C"/>
-                </a:solidFill>
-                <a:latin typeface="Segoe UI"/>
-              </a:rPr>
-              <a:t>FECHA</a:t>
-            </a:r>
-          </a:p>
-        </p:txBody>
-      </p:sp>
-      <p:sp>
-        <p:nvSpPr>
-          <p:cNvPr id="10" name="TextBox 9"/>
+                <a:spcPct val="120000"/>
+              </a:lnSpc>
+            </a:pPr>
+            <a:r>
+              <a:rPr sz="1000" b="0">
+                <a:solidFill>
+                  <a:srgbClr val="A9A5B4"/>
+                </a:solidFill>
+                <a:latin typeface="Segoe UI"/>
+              </a:rPr>
+              <a:t>Ingeniero en Finanzas · Diplomado en Gestión de Riesgos bajo estándar PMI</a:t>
+            </a:r>
+          </a:p>
+        </p:txBody>
+      </p:sp>
+      <p:sp>
+        <p:nvSpPr>
+          <p:cNvPr id="11" name="TextBox 10"/>
           <p:cNvSpPr txBox="1"/>
           <p:nvPr/>
         </p:nvSpPr>
         <p:spPr>
           <a:xfrm>
-            <a:off x="3401568" y="5477256"/>
-            <a:ext cx="2560320" cy="237744"/>
+            <a:off x="658368" y="5696712"/>
+            <a:ext cx="6766560" cy="201168"/>
           </a:xfrm>
           <a:prstGeom prst="rect">
             <a:avLst/>
@@ -3511,31 +3553,31 @@
           <a:p>
             <a:pPr algn="l">
               <a:lnSpc>
-                <a:spcPct val="124000"/>
-              </a:lnSpc>
-            </a:pPr>
-            <a:r>
-              <a:rPr sz="1150" b="1">
-                <a:solidFill>
-                  <a:srgbClr val="FFFFFF"/>
-                </a:solidFill>
-                <a:latin typeface="Segoe UI"/>
-              </a:rPr>
-              <a:t>31 de julio de 2026</a:t>
-            </a:r>
-          </a:p>
-        </p:txBody>
-      </p:sp>
-      <p:sp>
-        <p:nvSpPr>
-          <p:cNvPr id="11" name="TextBox 10"/>
+                <a:spcPct val="120000"/>
+              </a:lnSpc>
+            </a:pPr>
+            <a:r>
+              <a:rPr sz="1000" b="0">
+                <a:solidFill>
+                  <a:srgbClr val="A9A5B4"/>
+                </a:solidFill>
+                <a:latin typeface="Segoe UI"/>
+              </a:rPr>
+              <a:t>Operador Acreditado CMV</a:t>
+            </a:r>
+          </a:p>
+        </p:txBody>
+      </p:sp>
+      <p:sp>
+        <p:nvSpPr>
+          <p:cNvPr id="12" name="TextBox 11"/>
           <p:cNvSpPr txBox="1"/>
           <p:nvPr/>
         </p:nvSpPr>
         <p:spPr>
           <a:xfrm>
-            <a:off x="6144768" y="5257800"/>
-            <a:ext cx="2560320" cy="182880"/>
+            <a:off x="658368" y="5888736"/>
+            <a:ext cx="6766560" cy="201168"/>
           </a:xfrm>
           <a:prstGeom prst="rect">
             <a:avLst/>
@@ -3550,31 +3592,31 @@
           <a:p>
             <a:pPr algn="l">
               <a:lnSpc>
-                <a:spcPct val="124000"/>
-              </a:lnSpc>
-            </a:pPr>
-            <a:r>
-              <a:rPr sz="850" b="1">
-                <a:solidFill>
-                  <a:srgbClr val="6E6A7C"/>
-                </a:solidFill>
-                <a:latin typeface="Segoe UI"/>
-              </a:rPr>
-              <a:t>NATURALEZA</a:t>
-            </a:r>
-          </a:p>
-        </p:txBody>
-      </p:sp>
-      <p:sp>
-        <p:nvSpPr>
-          <p:cNvPr id="12" name="TextBox 11"/>
+                <a:spcPct val="120000"/>
+              </a:lnSpc>
+            </a:pPr>
+            <a:r>
+              <a:rPr sz="1000" b="0">
+                <a:solidFill>
+                  <a:srgbClr val="A9A5B4"/>
+                </a:solidFill>
+                <a:latin typeface="Segoe UI"/>
+              </a:rPr>
+              <a:t>Área de Estudios y Post-Venta · Grupo de Análisis de Mercado — GI</a:t>
+            </a:r>
+          </a:p>
+        </p:txBody>
+      </p:sp>
+      <p:sp>
+        <p:nvSpPr>
+          <p:cNvPr id="13" name="TextBox 12"/>
           <p:cNvSpPr txBox="1"/>
           <p:nvPr/>
         </p:nvSpPr>
         <p:spPr>
           <a:xfrm>
-            <a:off x="6144768" y="5477256"/>
-            <a:ext cx="2560320" cy="237744"/>
+            <a:off x="9208008" y="5010912"/>
+            <a:ext cx="2377440" cy="182880"/>
           </a:xfrm>
           <a:prstGeom prst="rect">
             <a:avLst/>
@@ -3593,7 +3635,124 @@
               </a:lnSpc>
             </a:pPr>
             <a:r>
-              <a:rPr sz="1150" b="1">
+              <a:rPr sz="850" b="1">
+                <a:solidFill>
+                  <a:srgbClr val="6E6A7C"/>
+                </a:solidFill>
+                <a:latin typeface="Segoe UI"/>
+              </a:rPr>
+              <a:t>FECHA</a:t>
+            </a:r>
+          </a:p>
+        </p:txBody>
+      </p:sp>
+      <p:sp>
+        <p:nvSpPr>
+          <p:cNvPr id="14" name="TextBox 13"/>
+          <p:cNvSpPr txBox="1"/>
+          <p:nvPr/>
+        </p:nvSpPr>
+        <p:spPr>
+          <a:xfrm>
+            <a:off x="9208008" y="5212080"/>
+            <a:ext cx="2377440" cy="237744"/>
+          </a:xfrm>
+          <a:prstGeom prst="rect">
+            <a:avLst/>
+          </a:prstGeom>
+          <a:noFill/>
+        </p:spPr>
+        <p:txBody>
+          <a:bodyPr wrap="square" anchor="t" lIns="0" rIns="0" tIns="0" bIns="0">
+            <a:spAutoFit/>
+          </a:bodyPr>
+          <a:lstStyle/>
+          <a:p>
+            <a:pPr algn="l">
+              <a:lnSpc>
+                <a:spcPct val="124000"/>
+              </a:lnSpc>
+            </a:pPr>
+            <a:r>
+              <a:rPr sz="1100" b="1">
+                <a:solidFill>
+                  <a:srgbClr val="FFFFFF"/>
+                </a:solidFill>
+                <a:latin typeface="Segoe UI"/>
+              </a:rPr>
+              <a:t>31 de julio de 2026</a:t>
+            </a:r>
+          </a:p>
+        </p:txBody>
+      </p:sp>
+      <p:sp>
+        <p:nvSpPr>
+          <p:cNvPr id="15" name="TextBox 14"/>
+          <p:cNvSpPr txBox="1"/>
+          <p:nvPr/>
+        </p:nvSpPr>
+        <p:spPr>
+          <a:xfrm>
+            <a:off x="9208008" y="5577840"/>
+            <a:ext cx="2377440" cy="182880"/>
+          </a:xfrm>
+          <a:prstGeom prst="rect">
+            <a:avLst/>
+          </a:prstGeom>
+          <a:noFill/>
+        </p:spPr>
+        <p:txBody>
+          <a:bodyPr wrap="square" anchor="t" lIns="0" rIns="0" tIns="0" bIns="0">
+            <a:spAutoFit/>
+          </a:bodyPr>
+          <a:lstStyle/>
+          <a:p>
+            <a:pPr algn="l">
+              <a:lnSpc>
+                <a:spcPct val="124000"/>
+              </a:lnSpc>
+            </a:pPr>
+            <a:r>
+              <a:rPr sz="850" b="1">
+                <a:solidFill>
+                  <a:srgbClr val="6E6A7C"/>
+                </a:solidFill>
+                <a:latin typeface="Segoe UI"/>
+              </a:rPr>
+              <a:t>NATURALEZA</a:t>
+            </a:r>
+          </a:p>
+        </p:txBody>
+      </p:sp>
+      <p:sp>
+        <p:nvSpPr>
+          <p:cNvPr id="16" name="TextBox 15"/>
+          <p:cNvSpPr txBox="1"/>
+          <p:nvPr/>
+        </p:nvSpPr>
+        <p:spPr>
+          <a:xfrm>
+            <a:off x="9208008" y="5779008"/>
+            <a:ext cx="2377440" cy="237744"/>
+          </a:xfrm>
+          <a:prstGeom prst="rect">
+            <a:avLst/>
+          </a:prstGeom>
+          <a:noFill/>
+        </p:spPr>
+        <p:txBody>
+          <a:bodyPr wrap="square" anchor="t" lIns="0" rIns="0" tIns="0" bIns="0">
+            <a:spAutoFit/>
+          </a:bodyPr>
+          <a:lstStyle/>
+          <a:p>
+            <a:pPr algn="l">
+              <a:lnSpc>
+                <a:spcPct val="124000"/>
+              </a:lnSpc>
+            </a:pPr>
+            <a:r>
+              <a:rPr sz="1100" b="1">
                 <a:solidFill>
                   <a:srgbClr val="FFFFFF"/>
                 </a:solidFill>
@@ -8145,7 +8304,7 @@
         <p:spPr>
           <a:xfrm>
             <a:off x="658368" y="1965960"/>
-            <a:ext cx="1828800" cy="1371600"/>
+            <a:ext cx="1600200" cy="1371600"/>
           </a:xfrm>
           <a:prstGeom prst="rect">
             <a:avLst/>
@@ -28249,7 +28408,7 @@
         <p:spPr>
           <a:xfrm>
             <a:off x="658368" y="1965960"/>
-            <a:ext cx="1828800" cy="1371600"/>
+            <a:ext cx="1600200" cy="1371600"/>
           </a:xfrm>
           <a:prstGeom prst="rect">
             <a:avLst/>
@@ -28530,7 +28689,7 @@
         <p:spPr>
           <a:xfrm>
             <a:off x="658368" y="1965960"/>
-            <a:ext cx="1828800" cy="1371600"/>
+            <a:ext cx="1600200" cy="1371600"/>
           </a:xfrm>
           <a:prstGeom prst="rect">
             <a:avLst/>
@@ -37340,7 +37499,7 @@
         <p:spPr>
           <a:xfrm>
             <a:off x="658368" y="1965960"/>
-            <a:ext cx="1828800" cy="1371600"/>
+            <a:ext cx="1600200" cy="1371600"/>
           </a:xfrm>
           <a:prstGeom prst="rect">
             <a:avLst/>
@@ -45447,7 +45606,7 @@
         <p:spPr>
           <a:xfrm>
             <a:off x="658368" y="1965960"/>
-            <a:ext cx="1828800" cy="1371600"/>
+            <a:ext cx="1600200" cy="1371600"/>
           </a:xfrm>
           <a:prstGeom prst="rect">
             <a:avLst/>
@@ -49847,7 +50006,7 @@
         <p:spPr>
           <a:xfrm>
             <a:off x="658368" y="1965960"/>
-            <a:ext cx="1828800" cy="1371600"/>
+            <a:ext cx="1600200" cy="1371600"/>
           </a:xfrm>
           <a:prstGeom prst="rect">
             <a:avLst/>
@@ -59512,7 +59671,7 @@
         </p:nvSpPr>
         <p:spPr>
           <a:xfrm>
-            <a:off x="658368" y="1051560"/>
+            <a:off x="658368" y="868680"/>
             <a:ext cx="10874959" cy="274320"/>
           </a:xfrm>
           <a:prstGeom prst="rect">
@@ -59551,8 +59710,8 @@
         </p:nvSpPr>
         <p:spPr>
           <a:xfrm>
-            <a:off x="658368" y="1463040"/>
-            <a:ext cx="9144000" cy="822960"/>
+            <a:off x="658368" y="1207008"/>
+            <a:ext cx="9144000" cy="457200"/>
           </a:xfrm>
           <a:prstGeom prst="rect">
             <a:avLst/>
@@ -59571,7 +59730,7 @@
               </a:lnSpc>
             </a:pPr>
             <a:r>
-              <a:rPr sz="3800" b="1">
+              <a:rPr sz="3600" b="1">
                 <a:solidFill>
                   <a:srgbClr val="FFFFFF"/>
                 </a:solidFill>
@@ -59590,7 +59749,7 @@
         </p:nvSpPr>
         <p:spPr>
           <a:xfrm>
-            <a:off x="658368" y="2121408"/>
+            <a:off x="658368" y="1901952"/>
             <a:ext cx="10874959" cy="1780032"/>
           </a:xfrm>
           <a:prstGeom prst="rect">
@@ -59632,7 +59791,7 @@
         </p:nvSpPr>
         <p:spPr>
           <a:xfrm>
-            <a:off x="658368" y="2121408"/>
+            <a:off x="658368" y="1901952"/>
             <a:ext cx="10874959" cy="28575"/>
           </a:xfrm>
           <a:prstGeom prst="rect">
@@ -59674,7 +59833,7 @@
         </p:nvSpPr>
         <p:spPr>
           <a:xfrm>
-            <a:off x="841248" y="2267712"/>
+            <a:off x="841248" y="2048256"/>
             <a:ext cx="10509199" cy="237744"/>
           </a:xfrm>
           <a:prstGeom prst="rect">
@@ -59713,7 +59872,7 @@
         </p:nvSpPr>
         <p:spPr>
           <a:xfrm>
-            <a:off x="841248" y="2560320"/>
+            <a:off x="841248" y="2340864"/>
             <a:ext cx="10509199" cy="1213104"/>
           </a:xfrm>
           <a:prstGeom prst="rect">
@@ -59843,7 +60002,7 @@
         </p:nvSpPr>
         <p:spPr>
           <a:xfrm>
-            <a:off x="658368" y="4066032"/>
+            <a:off x="658368" y="3828288"/>
             <a:ext cx="10874959" cy="1383792"/>
           </a:xfrm>
           <a:prstGeom prst="rect">
@@ -59885,7 +60044,7 @@
         </p:nvSpPr>
         <p:spPr>
           <a:xfrm>
-            <a:off x="658368" y="4066032"/>
+            <a:off x="658368" y="3828288"/>
             <a:ext cx="10874959" cy="28575"/>
           </a:xfrm>
           <a:prstGeom prst="rect">
@@ -59927,7 +60086,7 @@
         </p:nvSpPr>
         <p:spPr>
           <a:xfrm>
-            <a:off x="841248" y="4212336"/>
+            <a:off x="841248" y="3974592"/>
             <a:ext cx="10509199" cy="237744"/>
           </a:xfrm>
           <a:prstGeom prst="rect">
@@ -59966,7 +60125,7 @@
         </p:nvSpPr>
         <p:spPr>
           <a:xfrm>
-            <a:off x="841248" y="4504944"/>
+            <a:off x="841248" y="4267200"/>
             <a:ext cx="10509199" cy="816864"/>
           </a:xfrm>
           <a:prstGeom prst="rect">
@@ -60042,8 +60201,8 @@
         </p:nvSpPr>
         <p:spPr>
           <a:xfrm>
-            <a:off x="658368" y="5687568"/>
-            <a:ext cx="10874959" cy="472440"/>
+            <a:off x="658368" y="5449824"/>
+            <a:ext cx="6766560" cy="182880"/>
           </a:xfrm>
           <a:prstGeom prst="rect">
             <a:avLst/>
@@ -60058,11 +60217,50 @@
           <a:p>
             <a:pPr algn="l">
               <a:lnSpc>
-                <a:spcPct val="130000"/>
-              </a:lnSpc>
-            </a:pPr>
-            <a:r>
-              <a:rPr sz="1200" b="1">
+                <a:spcPct val="124000"/>
+              </a:lnSpc>
+            </a:pPr>
+            <a:r>
+              <a:rPr sz="850" b="1">
+                <a:solidFill>
+                  <a:srgbClr val="6E6A7C"/>
+                </a:solidFill>
+                <a:latin typeface="Segoe UI"/>
+              </a:rPr>
+              <a:t>ELABORADO POR</a:t>
+            </a:r>
+          </a:p>
+        </p:txBody>
+      </p:sp>
+      <p:sp>
+        <p:nvSpPr>
+          <p:cNvPr id="14" name="TextBox 13"/>
+          <p:cNvSpPr txBox="1"/>
+          <p:nvPr/>
+        </p:nvSpPr>
+        <p:spPr>
+          <a:xfrm>
+            <a:off x="658368" y="5669280"/>
+            <a:ext cx="6766560" cy="274320"/>
+          </a:xfrm>
+          <a:prstGeom prst="rect">
+            <a:avLst/>
+          </a:prstGeom>
+          <a:noFill/>
+        </p:spPr>
+        <p:txBody>
+          <a:bodyPr wrap="square" anchor="t" lIns="0" rIns="0" tIns="0" bIns="0">
+            <a:spAutoFit/>
+          </a:bodyPr>
+          <a:lstStyle/>
+          <a:p>
+            <a:pPr algn="l">
+              <a:lnSpc>
+                <a:spcPct val="124000"/>
+              </a:lnSpc>
+            </a:pPr>
+            <a:r>
+              <a:rPr sz="1300" b="1">
                 <a:solidFill>
                   <a:srgbClr val="FFFFFF"/>
                 </a:solidFill>
@@ -60070,30 +60268,122 @@
               </a:rPr>
               <a:t>Benjamín Ignacio Bravo Soza</a:t>
             </a:r>
-            <a:r>
-              <a:rPr sz="1200" b="0">
-                <a:solidFill>
-                  <a:srgbClr val="A9A5B4"/>
-                </a:solidFill>
-                <a:latin typeface="Segoe UI"/>
-              </a:rPr>
-              <a:t> — Ingeniero en Finanzas · Diplomado en Gestión de Riesgos bajo estándar PMI · Operador Acreditado CMV</a:t>
-            </a:r>
-          </a:p>
-          <a:p>
-            <a:pPr algn="l">
-              <a:lnSpc>
-                <a:spcPct val="130000"/>
-              </a:lnSpc>
-            </a:pPr>
-            <a:r>
-              <a:rPr sz="1200" b="0">
-                <a:solidFill>
-                  <a:srgbClr val="A9A5B4"/>
-                </a:solidFill>
-                <a:latin typeface="Segoe UI"/>
-              </a:rPr>
-              <a:t>Área de Estudios y Post-Venta · Grupo de Análisis de Mercado — GI · 31 de julio de 2026</a:t>
+          </a:p>
+        </p:txBody>
+      </p:sp>
+      <p:sp>
+        <p:nvSpPr>
+          <p:cNvPr id="15" name="TextBox 14"/>
+          <p:cNvSpPr txBox="1"/>
+          <p:nvPr/>
+        </p:nvSpPr>
+        <p:spPr>
+          <a:xfrm>
+            <a:off x="658368" y="5943600"/>
+            <a:ext cx="6766560" cy="201168"/>
+          </a:xfrm>
+          <a:prstGeom prst="rect">
+            <a:avLst/>
+          </a:prstGeom>
+          <a:noFill/>
+        </p:spPr>
+        <p:txBody>
+          <a:bodyPr wrap="square" anchor="t" lIns="0" rIns="0" tIns="0" bIns="0">
+            <a:spAutoFit/>
+          </a:bodyPr>
+          <a:lstStyle/>
+          <a:p>
+            <a:pPr algn="l">
+              <a:lnSpc>
+                <a:spcPct val="120000"/>
+              </a:lnSpc>
+            </a:pPr>
+            <a:r>
+              <a:rPr sz="1000" b="0">
+                <a:solidFill>
+                  <a:srgbClr val="A9A5B4"/>
+                </a:solidFill>
+                <a:latin typeface="Segoe UI"/>
+              </a:rPr>
+              <a:t>Ingeniero en Finanzas · Diplomado en Gestión de Riesgos bajo estándar PMI</a:t>
+            </a:r>
+          </a:p>
+        </p:txBody>
+      </p:sp>
+      <p:sp>
+        <p:nvSpPr>
+          <p:cNvPr id="16" name="TextBox 15"/>
+          <p:cNvSpPr txBox="1"/>
+          <p:nvPr/>
+        </p:nvSpPr>
+        <p:spPr>
+          <a:xfrm>
+            <a:off x="658368" y="6135624"/>
+            <a:ext cx="6766560" cy="201168"/>
+          </a:xfrm>
+          <a:prstGeom prst="rect">
+            <a:avLst/>
+          </a:prstGeom>
+          <a:noFill/>
+        </p:spPr>
+        <p:txBody>
+          <a:bodyPr wrap="square" anchor="t" lIns="0" rIns="0" tIns="0" bIns="0">
+            <a:spAutoFit/>
+          </a:bodyPr>
+          <a:lstStyle/>
+          <a:p>
+            <a:pPr algn="l">
+              <a:lnSpc>
+                <a:spcPct val="120000"/>
+              </a:lnSpc>
+            </a:pPr>
+            <a:r>
+              <a:rPr sz="1000" b="0">
+                <a:solidFill>
+                  <a:srgbClr val="A9A5B4"/>
+                </a:solidFill>
+                <a:latin typeface="Segoe UI"/>
+              </a:rPr>
+              <a:t>Operador Acreditado CMV · Área de Estudios y Post-Venta · GI</a:t>
+            </a:r>
+          </a:p>
+        </p:txBody>
+      </p:sp>
+      <p:sp>
+        <p:nvSpPr>
+          <p:cNvPr id="17" name="TextBox 16"/>
+          <p:cNvSpPr txBox="1"/>
+          <p:nvPr/>
+        </p:nvSpPr>
+        <p:spPr>
+          <a:xfrm>
+            <a:off x="9208008" y="5669280"/>
+            <a:ext cx="2377440" cy="219456"/>
+          </a:xfrm>
+          <a:prstGeom prst="rect">
+            <a:avLst/>
+          </a:prstGeom>
+          <a:noFill/>
+        </p:spPr>
+        <p:txBody>
+          <a:bodyPr wrap="square" anchor="t" lIns="0" rIns="0" tIns="0" bIns="0">
+            <a:spAutoFit/>
+          </a:bodyPr>
+          <a:lstStyle/>
+          <a:p>
+            <a:pPr algn="l">
+              <a:lnSpc>
+                <a:spcPct val="124000"/>
+              </a:lnSpc>
+            </a:pPr>
+            <a:r>
+              <a:rPr sz="1100" b="0">
+                <a:solidFill>
+                  <a:srgbClr val="A9A5B4"/>
+                </a:solidFill>
+                <a:latin typeface="Segoe UI"/>
+              </a:rPr>
+              <a:t>31 de julio de 2026</a:t>
             </a:r>
           </a:p>
         </p:txBody>

--- a/docs/capacitacion/Analisis Fundamental - Capacitacion GI.pptx
+++ b/docs/capacitacion/Analisis Fundamental - Capacitacion GI.pptx
@@ -3378,7 +3378,7 @@
         </p:nvSpPr>
         <p:spPr>
           <a:xfrm>
-            <a:off x="658368" y="4681728"/>
+            <a:off x="658368" y="4590288"/>
             <a:ext cx="10874959" cy="12700"/>
           </a:xfrm>
           <a:prstGeom prst="rect">
@@ -3412,15 +3412,39 @@
           <a:p/>
         </p:txBody>
       </p:sp>
-      <p:sp>
-        <p:nvSpPr>
-          <p:cNvPr id="8" name="TextBox 7"/>
+      <p:pic>
+        <p:nvPicPr>
+          <p:cNvPr id="8" name="Picture 7" descr="gi_retrato_WhatsApp Image 2026-07-02 at 20.34.23.png"/>
+          <p:cNvPicPr>
+            <a:picLocks noChangeAspect="1"/>
+          </p:cNvPicPr>
+          <p:nvPr/>
+        </p:nvPicPr>
+        <p:blipFill>
+          <a:blip r:embed="rId2"/>
+          <a:stretch>
+            <a:fillRect/>
+          </a:stretch>
+        </p:blipFill>
+        <p:spPr>
+          <a:xfrm>
+            <a:off x="658368" y="4864608"/>
+            <a:ext cx="1417320" cy="1417320"/>
+          </a:xfrm>
+          <a:prstGeom prst="rect">
+            <a:avLst/>
+          </a:prstGeom>
+        </p:spPr>
+      </p:pic>
+      <p:sp>
+        <p:nvSpPr>
+          <p:cNvPr id="9" name="TextBox 8"/>
           <p:cNvSpPr txBox="1"/>
           <p:nvPr/>
         </p:nvSpPr>
         <p:spPr>
           <a:xfrm>
-            <a:off x="658368" y="5010912"/>
+            <a:off x="2331720" y="5065776"/>
             <a:ext cx="6766560" cy="182880"/>
           </a:xfrm>
           <a:prstGeom prst="rect">
@@ -3453,13 +3477,13 @@
       </p:sp>
       <p:sp>
         <p:nvSpPr>
-          <p:cNvPr id="9" name="TextBox 8"/>
+          <p:cNvPr id="10" name="TextBox 9"/>
           <p:cNvSpPr txBox="1"/>
           <p:nvPr/>
         </p:nvSpPr>
         <p:spPr>
           <a:xfrm>
-            <a:off x="658368" y="5230368"/>
+            <a:off x="2331720" y="5285232"/>
             <a:ext cx="6766560" cy="274320"/>
           </a:xfrm>
           <a:prstGeom prst="rect">
@@ -3492,13 +3516,13 @@
       </p:sp>
       <p:sp>
         <p:nvSpPr>
-          <p:cNvPr id="10" name="TextBox 9"/>
+          <p:cNvPr id="11" name="TextBox 10"/>
           <p:cNvSpPr txBox="1"/>
           <p:nvPr/>
         </p:nvSpPr>
         <p:spPr>
           <a:xfrm>
-            <a:off x="658368" y="5504688"/>
+            <a:off x="2331720" y="5559552"/>
             <a:ext cx="6766560" cy="201168"/>
           </a:xfrm>
           <a:prstGeom prst="rect">
@@ -3531,13 +3555,13 @@
       </p:sp>
       <p:sp>
         <p:nvSpPr>
-          <p:cNvPr id="11" name="TextBox 10"/>
+          <p:cNvPr id="12" name="TextBox 11"/>
           <p:cNvSpPr txBox="1"/>
           <p:nvPr/>
         </p:nvSpPr>
         <p:spPr>
           <a:xfrm>
-            <a:off x="658368" y="5696712"/>
+            <a:off x="2331720" y="5751576"/>
             <a:ext cx="6766560" cy="201168"/>
           </a:xfrm>
           <a:prstGeom prst="rect">
@@ -3570,13 +3594,13 @@
       </p:sp>
       <p:sp>
         <p:nvSpPr>
-          <p:cNvPr id="12" name="TextBox 11"/>
+          <p:cNvPr id="13" name="TextBox 12"/>
           <p:cNvSpPr txBox="1"/>
           <p:nvPr/>
         </p:nvSpPr>
         <p:spPr>
           <a:xfrm>
-            <a:off x="658368" y="5888736"/>
+            <a:off x="2331720" y="5943600"/>
             <a:ext cx="6766560" cy="201168"/>
           </a:xfrm>
           <a:prstGeom prst="rect">
@@ -3609,13 +3633,13 @@
       </p:sp>
       <p:sp>
         <p:nvSpPr>
-          <p:cNvPr id="13" name="TextBox 12"/>
+          <p:cNvPr id="14" name="TextBox 13"/>
           <p:cNvSpPr txBox="1"/>
           <p:nvPr/>
         </p:nvSpPr>
         <p:spPr>
           <a:xfrm>
-            <a:off x="9208008" y="5010912"/>
+            <a:off x="9208008" y="5065776"/>
             <a:ext cx="2377440" cy="182880"/>
           </a:xfrm>
           <a:prstGeom prst="rect">
@@ -3648,13 +3672,13 @@
       </p:sp>
       <p:sp>
         <p:nvSpPr>
-          <p:cNvPr id="14" name="TextBox 13"/>
+          <p:cNvPr id="15" name="TextBox 14"/>
           <p:cNvSpPr txBox="1"/>
           <p:nvPr/>
         </p:nvSpPr>
         <p:spPr>
           <a:xfrm>
-            <a:off x="9208008" y="5212080"/>
+            <a:off x="9208008" y="5266944"/>
             <a:ext cx="2377440" cy="237744"/>
           </a:xfrm>
           <a:prstGeom prst="rect">
@@ -3687,13 +3711,13 @@
       </p:sp>
       <p:sp>
         <p:nvSpPr>
-          <p:cNvPr id="15" name="TextBox 14"/>
+          <p:cNvPr id="16" name="TextBox 15"/>
           <p:cNvSpPr txBox="1"/>
           <p:nvPr/>
         </p:nvSpPr>
         <p:spPr>
           <a:xfrm>
-            <a:off x="9208008" y="5577840"/>
+            <a:off x="9208008" y="5632704"/>
             <a:ext cx="2377440" cy="182880"/>
           </a:xfrm>
           <a:prstGeom prst="rect">
@@ -3726,13 +3750,13 @@
       </p:sp>
       <p:sp>
         <p:nvSpPr>
-          <p:cNvPr id="16" name="TextBox 15"/>
+          <p:cNvPr id="17" name="TextBox 16"/>
           <p:cNvSpPr txBox="1"/>
           <p:nvPr/>
         </p:nvSpPr>
         <p:spPr>
           <a:xfrm>
-            <a:off x="9208008" y="5779008"/>
+            <a:off x="9208008" y="5833872"/>
             <a:ext cx="2377440" cy="237744"/>
           </a:xfrm>
           <a:prstGeom prst="rect">
@@ -60193,15 +60217,39 @@
           </a:p>
         </p:txBody>
       </p:sp>
-      <p:sp>
-        <p:nvSpPr>
-          <p:cNvPr id="13" name="TextBox 12"/>
+      <p:pic>
+        <p:nvPicPr>
+          <p:cNvPr id="13" name="Picture 12" descr="gi_retrato_WhatsApp Image 2026-07-02 at 20.34.23.png"/>
+          <p:cNvPicPr>
+            <a:picLocks noChangeAspect="1"/>
+          </p:cNvPicPr>
+          <p:nvPr/>
+        </p:nvPicPr>
+        <p:blipFill>
+          <a:blip r:embed="rId2"/>
+          <a:stretch>
+            <a:fillRect/>
+          </a:stretch>
+        </p:blipFill>
+        <p:spPr>
+          <a:xfrm>
+            <a:off x="658368" y="5394960"/>
+            <a:ext cx="932688" cy="932688"/>
+          </a:xfrm>
+          <a:prstGeom prst="rect">
+            <a:avLst/>
+          </a:prstGeom>
+        </p:spPr>
+      </p:pic>
+      <p:sp>
+        <p:nvSpPr>
+          <p:cNvPr id="14" name="TextBox 13"/>
           <p:cNvSpPr txBox="1"/>
           <p:nvPr/>
         </p:nvSpPr>
         <p:spPr>
           <a:xfrm>
-            <a:off x="658368" y="5449824"/>
+            <a:off x="1847088" y="5449824"/>
             <a:ext cx="6766560" cy="182880"/>
           </a:xfrm>
           <a:prstGeom prst="rect">
@@ -60234,13 +60282,13 @@
       </p:sp>
       <p:sp>
         <p:nvSpPr>
-          <p:cNvPr id="14" name="TextBox 13"/>
+          <p:cNvPr id="15" name="TextBox 14"/>
           <p:cNvSpPr txBox="1"/>
           <p:nvPr/>
         </p:nvSpPr>
         <p:spPr>
           <a:xfrm>
-            <a:off x="658368" y="5669280"/>
+            <a:off x="1847088" y="5669280"/>
             <a:ext cx="6766560" cy="274320"/>
           </a:xfrm>
           <a:prstGeom prst="rect">
@@ -60273,13 +60321,13 @@
       </p:sp>
       <p:sp>
         <p:nvSpPr>
-          <p:cNvPr id="15" name="TextBox 14"/>
+          <p:cNvPr id="16" name="TextBox 15"/>
           <p:cNvSpPr txBox="1"/>
           <p:nvPr/>
         </p:nvSpPr>
         <p:spPr>
           <a:xfrm>
-            <a:off x="658368" y="5943600"/>
+            <a:off x="1847088" y="5943600"/>
             <a:ext cx="6766560" cy="201168"/>
           </a:xfrm>
           <a:prstGeom prst="rect">
@@ -60312,13 +60360,13 @@
       </p:sp>
       <p:sp>
         <p:nvSpPr>
-          <p:cNvPr id="16" name="TextBox 15"/>
+          <p:cNvPr id="17" name="TextBox 16"/>
           <p:cNvSpPr txBox="1"/>
           <p:nvPr/>
         </p:nvSpPr>
         <p:spPr>
           <a:xfrm>
-            <a:off x="658368" y="6135624"/>
+            <a:off x="1847088" y="6135624"/>
             <a:ext cx="6766560" cy="201168"/>
           </a:xfrm>
           <a:prstGeom prst="rect">
@@ -60351,7 +60399,7 @@
       </p:sp>
       <p:sp>
         <p:nvSpPr>
-          <p:cNvPr id="17" name="TextBox 16"/>
+          <p:cNvPr id="18" name="TextBox 17"/>
           <p:cNvSpPr txBox="1"/>
           <p:nvPr/>
         </p:nvSpPr>

--- a/docs/capacitacion/Analisis Fundamental - Capacitacion GI.pptx
+++ b/docs/capacitacion/Analisis Fundamental - Capacitacion GI.pptx
@@ -3414,7 +3414,7 @@
       </p:sp>
       <p:pic>
         <p:nvPicPr>
-          <p:cNvPr id="8" name="Picture 7" descr="gi_retrato_WhatsApp Image 2026-07-02 at 20.34.23.png"/>
+          <p:cNvPr id="8" name="Picture 7" descr="gi_retrato_WhatsApp Image 2026-07-02 at 20.34.23_720.png"/>
           <p:cNvPicPr>
             <a:picLocks noChangeAspect="1"/>
           </p:cNvPicPr>
@@ -60219,7 +60219,7 @@
       </p:sp>
       <p:pic>
         <p:nvPicPr>
-          <p:cNvPr id="13" name="Picture 12" descr="gi_retrato_WhatsApp Image 2026-07-02 at 20.34.23.png"/>
+          <p:cNvPr id="13" name="Picture 12" descr="gi_retrato_WhatsApp Image 2026-07-02 at 20.34.23_720.png"/>
           <p:cNvPicPr>
             <a:picLocks noChangeAspect="1"/>
           </p:cNvPicPr>
